--- a/dist/초2/사회·역사/변화와다양성/초2_사회·역사_변화와다양성_01_옛날과오늘_학생용.pptx
+++ b/dist/초2/사회·역사/변화와다양성/초2_사회·역사_변화와다양성_01_옛날과오늘_학생용.pptx
@@ -119,13 +119,13 @@
   <p:extLst>
     <p:ext uri="{521415D9-36F7-43E2-AB2F-B90AF26B5E84}">
       <p14:sectionLst xmlns:p14="http://schemas.microsoft.com/office/powerpoint/2010/main">
-        <p14:section name="도입" id="{544a5631-4af4-c3cc-939b-0f28df1ccef4}">
+        <p14:section name="도입" id="{ebb33b74-a024-9616-dcfc-a67b74f71404}">
           <p14:sldIdLst>
             <p14:sldId id="256"/>
             <p14:sldId id="257"/>
           </p14:sldIdLst>
         </p14:section>
-        <p14:section name="개념" id="{a3cc9941-374a-34a5-8195-feda29d4ad8c}">
+        <p14:section name="개념" id="{fa038acb-f741-cacc-2a2f-5c5379b113ad}">
           <p14:sldIdLst>
             <p14:sldId id="258"/>
             <p14:sldId id="259"/>
@@ -133,31 +133,31 @@
             <p14:sldId id="263"/>
           </p14:sldIdLst>
         </p14:section>
-        <p14:section name="연습" id="{0b46a462-4ce4-9990-66c7-4446e528e4c9}">
+        <p14:section name="연습" id="{1a988d46-300b-03e4-75c0-0bf94484d5c5}">
           <p14:sldIdLst>
             <p14:sldId id="261"/>
             <p14:sldId id="262"/>
             <p14:sldId id="264"/>
           </p14:sldIdLst>
         </p14:section>
-        <p14:section name="개념" id="{621749f0-a5dc-4bac-b975-824410c6f98a}">
+        <p14:section name="개념" id="{a931f443-f010-9e7e-4304-9624328de51f}">
           <p14:sldIdLst/>
         </p14:section>
-        <p14:section name="연습" id="{2954c5d3-4dc7-cc00-9158-61d426b69104}">
+        <p14:section name="연습" id="{ea705fa4-1d71-48cd-dc51-ac58bb4c3772}">
           <p14:sldIdLst/>
         </p14:section>
-        <p14:section name="확인" id="{ccad8a6f-e879-b8da-1433-1036079ca143}">
+        <p14:section name="확인" id="{5f01e7b5-82cd-648c-7cb0-f93ade5a270c}">
           <p14:sldIdLst>
             <p14:sldId id="265"/>
             <p14:sldId id="266"/>
           </p14:sldIdLst>
         </p14:section>
-        <p14:section name="정리" id="{c695619d-a5e2-1e46-77ec-99fe22a97743}">
+        <p14:section name="정리" id="{3ab68d5e-c72b-5e9e-ba25-10a114f5219f}">
           <p14:sldIdLst>
             <p14:sldId id="267"/>
           </p14:sldIdLst>
         </p14:section>
-        <p14:section name="보충" id="{64a0a99d-8988-2590-6f98-b3c1f8b11e35}">
+        <p14:section name="보충" id="{437ef6f5-def3-f1ef-1293-ab1f3d03359d}">
           <p14:sldIdLst>
             <p14:sldId id="268"/>
           </p14:sldIdLst>
